--- a/sayt/media/resources/2026/10/mehnat-muhofazasi-20-mavzu.pptx
+++ b/sayt/media/resources/2026/10/mehnat-muhofazasi-20-mavzu.pptx
@@ -18119,7 +18119,7 @@
                 </a:solidFill>
                 <a:latin typeface="Georgia"/>
               </a:rPr>
-              <a:t>Uzluksiz quvvat manbalari (ups) bilan ishlash qoidalari</a:t>
+              <a:t>Uzluksiz quvvat manbalari (UPS) bilan ishlash qoidalari</a:t>
             </a:r>
           </a:p>
         </p:txBody>
